--- a/python/CourseDesign/Week09e/Week9_Lecture17_PSD_Periodogram.pptx
+++ b/python/CourseDesign/Week09e/Week9_Lecture17_PSD_Periodogram.pptx
@@ -5,24 +5,24 @@
     <p:sldMasterId id="2147483648" r:id="rId1"/>
   </p:sldMasterIdLst>
   <p:sldIdLst>
-    <p:sldId id="256" r:id="rId7"/>
-    <p:sldId id="257" r:id="rId8"/>
-    <p:sldId id="258" r:id="rId9"/>
-    <p:sldId id="259" r:id="rId10"/>
-    <p:sldId id="260" r:id="rId11"/>
-    <p:sldId id="261" r:id="rId12"/>
-    <p:sldId id="262" r:id="rId13"/>
-    <p:sldId id="263" r:id="rId14"/>
-    <p:sldId id="264" r:id="rId15"/>
-    <p:sldId id="265" r:id="rId16"/>
-    <p:sldId id="266" r:id="rId17"/>
-    <p:sldId id="267" r:id="rId18"/>
-    <p:sldId id="268" r:id="rId19"/>
-    <p:sldId id="269" r:id="rId20"/>
-    <p:sldId id="270" r:id="rId21"/>
-    <p:sldId id="271" r:id="rId22"/>
+    <p:sldId id="256" r:id="rId2"/>
+    <p:sldId id="257" r:id="rId3"/>
+    <p:sldId id="258" r:id="rId4"/>
+    <p:sldId id="259" r:id="rId5"/>
+    <p:sldId id="260" r:id="rId6"/>
+    <p:sldId id="261" r:id="rId7"/>
+    <p:sldId id="262" r:id="rId8"/>
+    <p:sldId id="263" r:id="rId9"/>
+    <p:sldId id="264" r:id="rId10"/>
+    <p:sldId id="265" r:id="rId11"/>
+    <p:sldId id="266" r:id="rId12"/>
+    <p:sldId id="267" r:id="rId13"/>
+    <p:sldId id="268" r:id="rId14"/>
+    <p:sldId id="269" r:id="rId15"/>
+    <p:sldId id="270" r:id="rId16"/>
+    <p:sldId id="271" r:id="rId17"/>
   </p:sldIdLst>
-  <p:sldSz cx="12191695" cy="6858000" type="screen4x3"/>
+  <p:sldSz cx="12192000" cy="6858000"/>
   <p:notesSz cx="6858000" cy="9144000"/>
   <p:defaultTextStyle>
     <a:defPPr>
@@ -119,6 +119,22 @@
       </a:defRPr>
     </a:lvl9pPr>
   </p:defaultTextStyle>
+  <p:extLst>
+    <p:ext uri="{EFAFB233-063F-42B5-8137-9DF3F51BA10A}">
+      <p15:sldGuideLst xmlns:p15="http://schemas.microsoft.com/office/powerpoint/2012/main">
+        <p15:guide id="1" orient="horz" pos="2160">
+          <p15:clr>
+            <a:srgbClr val="A4A3A4"/>
+          </p15:clr>
+        </p15:guide>
+        <p15:guide id="2" pos="2880">
+          <p15:clr>
+            <a:srgbClr val="A4A3A4"/>
+          </p15:clr>
+        </p15:guide>
+      </p15:sldGuideLst>
+    </p:ext>
+  </p:extLst>
 </p:presentation>
 </file>
 
@@ -160,10 +176,9 @@
           <a:lstStyle/>
           <a:p>
             <a:r>
-              <a:rPr lang="en-US" smtClean="0"/>
+              <a:rPr lang="en-US"/>
               <a:t>Click to edit Master title style</a:t>
             </a:r>
-            <a:endParaRPr lang="en-US"/>
           </a:p>
         </p:txBody>
       </p:sp>
@@ -279,10 +294,9 @@
           </a:lstStyle>
           <a:p>
             <a:r>
-              <a:rPr lang="en-US" smtClean="0"/>
+              <a:rPr lang="en-US"/>
               <a:t>Click to edit Master subtitle style</a:t>
             </a:r>
-            <a:endParaRPr lang="en-US"/>
           </a:p>
         </p:txBody>
       </p:sp>
@@ -303,7 +317,7 @@
           <a:p>
             <a:fld id="{5BCAD085-E8A6-8845-BD4E-CB4CCA059FC4}" type="datetimeFigureOut">
               <a:rPr lang="en-US" smtClean="0"/>
-              <a:t>1/27/13</a:t>
+              <a:t>9/29/2026</a:t>
             </a:fld>
             <a:endParaRPr lang="en-US"/>
           </a:p>
@@ -397,10 +411,9 @@
           <a:lstStyle/>
           <a:p>
             <a:r>
-              <a:rPr lang="en-US" smtClean="0"/>
+              <a:rPr lang="en-US"/>
               <a:t>Click to edit Master title style</a:t>
             </a:r>
-            <a:endParaRPr lang="en-US"/>
           </a:p>
         </p:txBody>
       </p:sp>
@@ -421,38 +434,37 @@
           <a:p>
             <a:pPr lvl="0"/>
             <a:r>
-              <a:rPr lang="en-US" smtClean="0"/>
+              <a:rPr lang="en-US"/>
               <a:t>Click to edit Master text styles</a:t>
             </a:r>
           </a:p>
           <a:p>
             <a:pPr lvl="1"/>
             <a:r>
-              <a:rPr lang="en-US" smtClean="0"/>
+              <a:rPr lang="en-US"/>
               <a:t>Second level</a:t>
             </a:r>
           </a:p>
           <a:p>
             <a:pPr lvl="2"/>
             <a:r>
-              <a:rPr lang="en-US" smtClean="0"/>
+              <a:rPr lang="en-US"/>
               <a:t>Third level</a:t>
             </a:r>
           </a:p>
           <a:p>
             <a:pPr lvl="3"/>
             <a:r>
-              <a:rPr lang="en-US" smtClean="0"/>
+              <a:rPr lang="en-US"/>
               <a:t>Fourth level</a:t>
             </a:r>
           </a:p>
           <a:p>
             <a:pPr lvl="4"/>
             <a:r>
-              <a:rPr lang="en-US" smtClean="0"/>
+              <a:rPr lang="en-US"/>
               <a:t>Fifth level</a:t>
             </a:r>
-            <a:endParaRPr lang="en-US"/>
           </a:p>
         </p:txBody>
       </p:sp>
@@ -473,7 +485,7 @@
           <a:p>
             <a:fld id="{5BCAD085-E8A6-8845-BD4E-CB4CCA059FC4}" type="datetimeFigureOut">
               <a:rPr lang="en-US" smtClean="0"/>
-              <a:t>1/27/13</a:t>
+              <a:t>9/29/2026</a:t>
             </a:fld>
             <a:endParaRPr lang="en-US"/>
           </a:p>
@@ -572,10 +584,9 @@
           <a:lstStyle/>
           <a:p>
             <a:r>
-              <a:rPr lang="en-US" smtClean="0"/>
+              <a:rPr lang="en-US"/>
               <a:t>Click to edit Master title style</a:t>
             </a:r>
-            <a:endParaRPr lang="en-US"/>
           </a:p>
         </p:txBody>
       </p:sp>
@@ -601,38 +612,37 @@
           <a:p>
             <a:pPr lvl="0"/>
             <a:r>
-              <a:rPr lang="en-US" smtClean="0"/>
+              <a:rPr lang="en-US"/>
               <a:t>Click to edit Master text styles</a:t>
             </a:r>
           </a:p>
           <a:p>
             <a:pPr lvl="1"/>
             <a:r>
-              <a:rPr lang="en-US" smtClean="0"/>
+              <a:rPr lang="en-US"/>
               <a:t>Second level</a:t>
             </a:r>
           </a:p>
           <a:p>
             <a:pPr lvl="2"/>
             <a:r>
-              <a:rPr lang="en-US" smtClean="0"/>
+              <a:rPr lang="en-US"/>
               <a:t>Third level</a:t>
             </a:r>
           </a:p>
           <a:p>
             <a:pPr lvl="3"/>
             <a:r>
-              <a:rPr lang="en-US" smtClean="0"/>
+              <a:rPr lang="en-US"/>
               <a:t>Fourth level</a:t>
             </a:r>
           </a:p>
           <a:p>
             <a:pPr lvl="4"/>
             <a:r>
-              <a:rPr lang="en-US" smtClean="0"/>
+              <a:rPr lang="en-US"/>
               <a:t>Fifth level</a:t>
             </a:r>
-            <a:endParaRPr lang="en-US"/>
           </a:p>
         </p:txBody>
       </p:sp>
@@ -653,7 +663,7 @@
           <a:p>
             <a:fld id="{5BCAD085-E8A6-8845-BD4E-CB4CCA059FC4}" type="datetimeFigureOut">
               <a:rPr lang="en-US" smtClean="0"/>
-              <a:t>1/27/13</a:t>
+              <a:t>9/29/2026</a:t>
             </a:fld>
             <a:endParaRPr lang="en-US"/>
           </a:p>
@@ -747,10 +757,9 @@
           <a:lstStyle/>
           <a:p>
             <a:r>
-              <a:rPr lang="en-US" smtClean="0"/>
+              <a:rPr lang="en-US"/>
               <a:t>Click to edit Master title style</a:t>
             </a:r>
-            <a:endParaRPr lang="en-US"/>
           </a:p>
         </p:txBody>
       </p:sp>
@@ -771,38 +780,37 @@
           <a:p>
             <a:pPr lvl="0"/>
             <a:r>
-              <a:rPr lang="en-US" smtClean="0"/>
+              <a:rPr lang="en-US"/>
               <a:t>Click to edit Master text styles</a:t>
             </a:r>
           </a:p>
           <a:p>
             <a:pPr lvl="1"/>
             <a:r>
-              <a:rPr lang="en-US" smtClean="0"/>
+              <a:rPr lang="en-US"/>
               <a:t>Second level</a:t>
             </a:r>
           </a:p>
           <a:p>
             <a:pPr lvl="2"/>
             <a:r>
-              <a:rPr lang="en-US" smtClean="0"/>
+              <a:rPr lang="en-US"/>
               <a:t>Third level</a:t>
             </a:r>
           </a:p>
           <a:p>
             <a:pPr lvl="3"/>
             <a:r>
-              <a:rPr lang="en-US" smtClean="0"/>
+              <a:rPr lang="en-US"/>
               <a:t>Fourth level</a:t>
             </a:r>
           </a:p>
           <a:p>
             <a:pPr lvl="4"/>
             <a:r>
-              <a:rPr lang="en-US" smtClean="0"/>
+              <a:rPr lang="en-US"/>
               <a:t>Fifth level</a:t>
             </a:r>
-            <a:endParaRPr lang="en-US"/>
           </a:p>
         </p:txBody>
       </p:sp>
@@ -823,7 +831,7 @@
           <a:p>
             <a:fld id="{5BCAD085-E8A6-8845-BD4E-CB4CCA059FC4}" type="datetimeFigureOut">
               <a:rPr lang="en-US" smtClean="0"/>
-              <a:t>1/27/13</a:t>
+              <a:t>9/29/2026</a:t>
             </a:fld>
             <a:endParaRPr lang="en-US"/>
           </a:p>
@@ -926,10 +934,9 @@
           </a:lstStyle>
           <a:p>
             <a:r>
-              <a:rPr lang="en-US" smtClean="0"/>
+              <a:rPr lang="en-US"/>
               <a:t>Click to edit Master title style</a:t>
             </a:r>
-            <a:endParaRPr lang="en-US"/>
           </a:p>
         </p:txBody>
       </p:sp>
@@ -1046,7 +1053,7 @@
           <a:p>
             <a:pPr lvl="0"/>
             <a:r>
-              <a:rPr lang="en-US" smtClean="0"/>
+              <a:rPr lang="en-US"/>
               <a:t>Click to edit Master text styles</a:t>
             </a:r>
           </a:p>
@@ -1069,7 +1076,7 @@
           <a:p>
             <a:fld id="{5BCAD085-E8A6-8845-BD4E-CB4CCA059FC4}" type="datetimeFigureOut">
               <a:rPr lang="en-US" smtClean="0"/>
-              <a:t>1/27/13</a:t>
+              <a:t>9/29/2026</a:t>
             </a:fld>
             <a:endParaRPr lang="en-US"/>
           </a:p>
@@ -1163,10 +1170,9 @@
           <a:lstStyle/>
           <a:p>
             <a:r>
-              <a:rPr lang="en-US" smtClean="0"/>
+              <a:rPr lang="en-US"/>
               <a:t>Click to edit Master title style</a:t>
             </a:r>
-            <a:endParaRPr lang="en-US"/>
           </a:p>
         </p:txBody>
       </p:sp>
@@ -1220,38 +1226,37 @@
           <a:p>
             <a:pPr lvl="0"/>
             <a:r>
-              <a:rPr lang="en-US" smtClean="0"/>
+              <a:rPr lang="en-US"/>
               <a:t>Click to edit Master text styles</a:t>
             </a:r>
           </a:p>
           <a:p>
             <a:pPr lvl="1"/>
             <a:r>
-              <a:rPr lang="en-US" smtClean="0"/>
+              <a:rPr lang="en-US"/>
               <a:t>Second level</a:t>
             </a:r>
           </a:p>
           <a:p>
             <a:pPr lvl="2"/>
             <a:r>
-              <a:rPr lang="en-US" smtClean="0"/>
+              <a:rPr lang="en-US"/>
               <a:t>Third level</a:t>
             </a:r>
           </a:p>
           <a:p>
             <a:pPr lvl="3"/>
             <a:r>
-              <a:rPr lang="en-US" smtClean="0"/>
+              <a:rPr lang="en-US"/>
               <a:t>Fourth level</a:t>
             </a:r>
           </a:p>
           <a:p>
             <a:pPr lvl="4"/>
             <a:r>
-              <a:rPr lang="en-US" smtClean="0"/>
+              <a:rPr lang="en-US"/>
               <a:t>Fifth level</a:t>
             </a:r>
-            <a:endParaRPr lang="en-US"/>
           </a:p>
         </p:txBody>
       </p:sp>
@@ -1305,38 +1310,37 @@
           <a:p>
             <a:pPr lvl="0"/>
             <a:r>
-              <a:rPr lang="en-US" smtClean="0"/>
+              <a:rPr lang="en-US"/>
               <a:t>Click to edit Master text styles</a:t>
             </a:r>
           </a:p>
           <a:p>
             <a:pPr lvl="1"/>
             <a:r>
-              <a:rPr lang="en-US" smtClean="0"/>
+              <a:rPr lang="en-US"/>
               <a:t>Second level</a:t>
             </a:r>
           </a:p>
           <a:p>
             <a:pPr lvl="2"/>
             <a:r>
-              <a:rPr lang="en-US" smtClean="0"/>
+              <a:rPr lang="en-US"/>
               <a:t>Third level</a:t>
             </a:r>
           </a:p>
           <a:p>
             <a:pPr lvl="3"/>
             <a:r>
-              <a:rPr lang="en-US" smtClean="0"/>
+              <a:rPr lang="en-US"/>
               <a:t>Fourth level</a:t>
             </a:r>
           </a:p>
           <a:p>
             <a:pPr lvl="4"/>
             <a:r>
-              <a:rPr lang="en-US" smtClean="0"/>
+              <a:rPr lang="en-US"/>
               <a:t>Fifth level</a:t>
             </a:r>
-            <a:endParaRPr lang="en-US"/>
           </a:p>
         </p:txBody>
       </p:sp>
@@ -1357,7 +1361,7 @@
           <a:p>
             <a:fld id="{5BCAD085-E8A6-8845-BD4E-CB4CCA059FC4}" type="datetimeFigureOut">
               <a:rPr lang="en-US" smtClean="0"/>
-              <a:t>1/27/13</a:t>
+              <a:t>9/29/2026</a:t>
             </a:fld>
             <a:endParaRPr lang="en-US"/>
           </a:p>
@@ -1455,10 +1459,9 @@
           </a:lstStyle>
           <a:p>
             <a:r>
-              <a:rPr lang="en-US" smtClean="0"/>
+              <a:rPr lang="en-US"/>
               <a:t>Click to edit Master title style</a:t>
             </a:r>
-            <a:endParaRPr lang="en-US"/>
           </a:p>
         </p:txBody>
       </p:sp>
@@ -1521,7 +1524,7 @@
           <a:p>
             <a:pPr lvl="0"/>
             <a:r>
-              <a:rPr lang="en-US" smtClean="0"/>
+              <a:rPr lang="en-US"/>
               <a:t>Click to edit Master text styles</a:t>
             </a:r>
           </a:p>
@@ -1577,38 +1580,37 @@
           <a:p>
             <a:pPr lvl="0"/>
             <a:r>
-              <a:rPr lang="en-US" smtClean="0"/>
+              <a:rPr lang="en-US"/>
               <a:t>Click to edit Master text styles</a:t>
             </a:r>
           </a:p>
           <a:p>
             <a:pPr lvl="1"/>
             <a:r>
-              <a:rPr lang="en-US" smtClean="0"/>
+              <a:rPr lang="en-US"/>
               <a:t>Second level</a:t>
             </a:r>
           </a:p>
           <a:p>
             <a:pPr lvl="2"/>
             <a:r>
-              <a:rPr lang="en-US" smtClean="0"/>
+              <a:rPr lang="en-US"/>
               <a:t>Third level</a:t>
             </a:r>
           </a:p>
           <a:p>
             <a:pPr lvl="3"/>
             <a:r>
-              <a:rPr lang="en-US" smtClean="0"/>
+              <a:rPr lang="en-US"/>
               <a:t>Fourth level</a:t>
             </a:r>
           </a:p>
           <a:p>
             <a:pPr lvl="4"/>
             <a:r>
-              <a:rPr lang="en-US" smtClean="0"/>
+              <a:rPr lang="en-US"/>
               <a:t>Fifth level</a:t>
             </a:r>
-            <a:endParaRPr lang="en-US"/>
           </a:p>
         </p:txBody>
       </p:sp>
@@ -1671,7 +1673,7 @@
           <a:p>
             <a:pPr lvl="0"/>
             <a:r>
-              <a:rPr lang="en-US" smtClean="0"/>
+              <a:rPr lang="en-US"/>
               <a:t>Click to edit Master text styles</a:t>
             </a:r>
           </a:p>
@@ -1727,38 +1729,37 @@
           <a:p>
             <a:pPr lvl="0"/>
             <a:r>
-              <a:rPr lang="en-US" smtClean="0"/>
+              <a:rPr lang="en-US"/>
               <a:t>Click to edit Master text styles</a:t>
             </a:r>
           </a:p>
           <a:p>
             <a:pPr lvl="1"/>
             <a:r>
-              <a:rPr lang="en-US" smtClean="0"/>
+              <a:rPr lang="en-US"/>
               <a:t>Second level</a:t>
             </a:r>
           </a:p>
           <a:p>
             <a:pPr lvl="2"/>
             <a:r>
-              <a:rPr lang="en-US" smtClean="0"/>
+              <a:rPr lang="en-US"/>
               <a:t>Third level</a:t>
             </a:r>
           </a:p>
           <a:p>
             <a:pPr lvl="3"/>
             <a:r>
-              <a:rPr lang="en-US" smtClean="0"/>
+              <a:rPr lang="en-US"/>
               <a:t>Fourth level</a:t>
             </a:r>
           </a:p>
           <a:p>
             <a:pPr lvl="4"/>
             <a:r>
-              <a:rPr lang="en-US" smtClean="0"/>
+              <a:rPr lang="en-US"/>
               <a:t>Fifth level</a:t>
             </a:r>
-            <a:endParaRPr lang="en-US"/>
           </a:p>
         </p:txBody>
       </p:sp>
@@ -1779,7 +1780,7 @@
           <a:p>
             <a:fld id="{5BCAD085-E8A6-8845-BD4E-CB4CCA059FC4}" type="datetimeFigureOut">
               <a:rPr lang="en-US" smtClean="0"/>
-              <a:t>1/27/13</a:t>
+              <a:t>9/29/2026</a:t>
             </a:fld>
             <a:endParaRPr lang="en-US"/>
           </a:p>
@@ -1873,10 +1874,9 @@
           <a:lstStyle/>
           <a:p>
             <a:r>
-              <a:rPr lang="en-US" smtClean="0"/>
+              <a:rPr lang="en-US"/>
               <a:t>Click to edit Master title style</a:t>
             </a:r>
-            <a:endParaRPr lang="en-US"/>
           </a:p>
         </p:txBody>
       </p:sp>
@@ -1897,7 +1897,7 @@
           <a:p>
             <a:fld id="{5BCAD085-E8A6-8845-BD4E-CB4CCA059FC4}" type="datetimeFigureOut">
               <a:rPr lang="en-US" smtClean="0"/>
-              <a:t>1/27/13</a:t>
+              <a:t>9/29/2026</a:t>
             </a:fld>
             <a:endParaRPr lang="en-US"/>
           </a:p>
@@ -1992,7 +1992,7 @@
           <a:p>
             <a:fld id="{5BCAD085-E8A6-8845-BD4E-CB4CCA059FC4}" type="datetimeFigureOut">
               <a:rPr lang="en-US" smtClean="0"/>
-              <a:t>1/27/13</a:t>
+              <a:t>9/29/2026</a:t>
             </a:fld>
             <a:endParaRPr lang="en-US"/>
           </a:p>
@@ -2095,10 +2095,9 @@
           </a:lstStyle>
           <a:p>
             <a:r>
-              <a:rPr lang="en-US" smtClean="0"/>
+              <a:rPr lang="en-US"/>
               <a:t>Click to edit Master title style</a:t>
             </a:r>
-            <a:endParaRPr lang="en-US"/>
           </a:p>
         </p:txBody>
       </p:sp>
@@ -2152,38 +2151,37 @@
           <a:p>
             <a:pPr lvl="0"/>
             <a:r>
-              <a:rPr lang="en-US" smtClean="0"/>
+              <a:rPr lang="en-US"/>
               <a:t>Click to edit Master text styles</a:t>
             </a:r>
           </a:p>
           <a:p>
             <a:pPr lvl="1"/>
             <a:r>
-              <a:rPr lang="en-US" smtClean="0"/>
+              <a:rPr lang="en-US"/>
               <a:t>Second level</a:t>
             </a:r>
           </a:p>
           <a:p>
             <a:pPr lvl="2"/>
             <a:r>
-              <a:rPr lang="en-US" smtClean="0"/>
+              <a:rPr lang="en-US"/>
               <a:t>Third level</a:t>
             </a:r>
           </a:p>
           <a:p>
             <a:pPr lvl="3"/>
             <a:r>
-              <a:rPr lang="en-US" smtClean="0"/>
+              <a:rPr lang="en-US"/>
               <a:t>Fourth level</a:t>
             </a:r>
           </a:p>
           <a:p>
             <a:pPr lvl="4"/>
             <a:r>
-              <a:rPr lang="en-US" smtClean="0"/>
+              <a:rPr lang="en-US"/>
               <a:t>Fifth level</a:t>
             </a:r>
-            <a:endParaRPr lang="en-US"/>
           </a:p>
         </p:txBody>
       </p:sp>
@@ -2246,7 +2244,7 @@
           <a:p>
             <a:pPr lvl="0"/>
             <a:r>
-              <a:rPr lang="en-US" smtClean="0"/>
+              <a:rPr lang="en-US"/>
               <a:t>Click to edit Master text styles</a:t>
             </a:r>
           </a:p>
@@ -2269,7 +2267,7 @@
           <a:p>
             <a:fld id="{5BCAD085-E8A6-8845-BD4E-CB4CCA059FC4}" type="datetimeFigureOut">
               <a:rPr lang="en-US" smtClean="0"/>
-              <a:t>1/27/13</a:t>
+              <a:t>9/29/2026</a:t>
             </a:fld>
             <a:endParaRPr lang="en-US"/>
           </a:p>
@@ -2372,10 +2370,9 @@
           </a:lstStyle>
           <a:p>
             <a:r>
-              <a:rPr lang="en-US" smtClean="0"/>
+              <a:rPr lang="en-US"/>
               <a:t>Click to edit Master title style</a:t>
             </a:r>
-            <a:endParaRPr lang="en-US"/>
           </a:p>
         </p:txBody>
       </p:sp>
@@ -2499,7 +2496,7 @@
           <a:p>
             <a:pPr lvl="0"/>
             <a:r>
-              <a:rPr lang="en-US" smtClean="0"/>
+              <a:rPr lang="en-US"/>
               <a:t>Click to edit Master text styles</a:t>
             </a:r>
           </a:p>
@@ -2522,7 +2519,7 @@
           <a:p>
             <a:fld id="{5BCAD085-E8A6-8845-BD4E-CB4CCA059FC4}" type="datetimeFigureOut">
               <a:rPr lang="en-US" smtClean="0"/>
-              <a:t>1/27/13</a:t>
+              <a:t>9/29/2026</a:t>
             </a:fld>
             <a:endParaRPr lang="en-US"/>
           </a:p>
@@ -2631,10 +2628,9 @@
           <a:lstStyle/>
           <a:p>
             <a:r>
-              <a:rPr lang="en-US" smtClean="0"/>
+              <a:rPr lang="en-US"/>
               <a:t>Click to edit Master title style</a:t>
             </a:r>
-            <a:endParaRPr lang="en-US"/>
           </a:p>
         </p:txBody>
       </p:sp>
@@ -2665,38 +2661,37 @@
           <a:p>
             <a:pPr lvl="0"/>
             <a:r>
-              <a:rPr lang="en-US" smtClean="0"/>
+              <a:rPr lang="en-US"/>
               <a:t>Click to edit Master text styles</a:t>
             </a:r>
           </a:p>
           <a:p>
             <a:pPr lvl="1"/>
             <a:r>
-              <a:rPr lang="en-US" smtClean="0"/>
+              <a:rPr lang="en-US"/>
               <a:t>Second level</a:t>
             </a:r>
           </a:p>
           <a:p>
             <a:pPr lvl="2"/>
             <a:r>
-              <a:rPr lang="en-US" smtClean="0"/>
+              <a:rPr lang="en-US"/>
               <a:t>Third level</a:t>
             </a:r>
           </a:p>
           <a:p>
             <a:pPr lvl="3"/>
             <a:r>
-              <a:rPr lang="en-US" smtClean="0"/>
+              <a:rPr lang="en-US"/>
               <a:t>Fourth level</a:t>
             </a:r>
           </a:p>
           <a:p>
             <a:pPr lvl="4"/>
             <a:r>
-              <a:rPr lang="en-US" smtClean="0"/>
+              <a:rPr lang="en-US"/>
               <a:t>Fifth level</a:t>
             </a:r>
-            <a:endParaRPr lang="en-US"/>
           </a:p>
         </p:txBody>
       </p:sp>
@@ -2735,7 +2730,7 @@
           <a:p>
             <a:fld id="{5BCAD085-E8A6-8845-BD4E-CB4CCA059FC4}" type="datetimeFigureOut">
               <a:rPr lang="en-US" smtClean="0"/>
-              <a:t>1/27/13</a:t>
+              <a:t>9/29/2026</a:t>
             </a:fld>
             <a:endParaRPr lang="en-US"/>
           </a:p>
@@ -3094,7 +3089,7 @@
 </file>
 
 <file path=ppt/slides/slide1.xml><?xml version="1.0" encoding="utf-8"?>
-<p:sld xmlns:a="http://schemas.openxmlformats.org/drawingml/2006/main" xmlns:p="http://schemas.openxmlformats.org/presentationml/2006/main" xmlns:r="http://schemas.openxmlformats.org/officeDocument/2006/relationships">
+<p:sld xmlns:a="http://schemas.openxmlformats.org/drawingml/2006/main" xmlns:r="http://schemas.openxmlformats.org/officeDocument/2006/relationships" xmlns:p="http://schemas.openxmlformats.org/presentationml/2006/main">
   <p:cSld>
     <p:bg>
       <p:bgPr>
@@ -3110,7 +3105,14 @@
         <p:cNvGrpSpPr/>
         <p:nvPr/>
       </p:nvGrpSpPr>
-      <p:grpSpPr/>
+      <p:grpSpPr>
+        <a:xfrm>
+          <a:off x="0" y="0"/>
+          <a:ext cx="0" cy="0"/>
+          <a:chOff x="0" y="0"/>
+          <a:chExt cx="0" cy="0"/>
+        </a:xfrm>
+      </p:grpSpPr>
       <p:sp>
         <p:nvSpPr>
           <p:cNvPr id="2" name="TextBox 1"/>
@@ -3135,7 +3137,16 @@
           <a:p>
             <a:pPr algn="l"/>
             <a:r>
-              <a:rPr sz="1400" b="1">
+              <a:rPr lang="en-US" sz="1400" b="1" dirty="0">
+                <a:solidFill>
+                  <a:srgbClr val="24888E"/>
+                </a:solidFill>
+                <a:latin typeface="Aptos"/>
+              </a:rPr>
+              <a:t>WEEK 9 ● </a:t>
+            </a:r>
+            <a:r>
+              <a:rPr sz="1400" b="1" dirty="0">
                 <a:solidFill>
                   <a:srgbClr val="24888E"/>
                 </a:solidFill>
@@ -3260,7 +3271,7 @@
 </file>
 
 <file path=ppt/slides/slide10.xml><?xml version="1.0" encoding="utf-8"?>
-<p:sld xmlns:a="http://schemas.openxmlformats.org/drawingml/2006/main" xmlns:p="http://schemas.openxmlformats.org/presentationml/2006/main" xmlns:r="http://schemas.openxmlformats.org/officeDocument/2006/relationships">
+<p:sld xmlns:a="http://schemas.openxmlformats.org/drawingml/2006/main" xmlns:r="http://schemas.openxmlformats.org/officeDocument/2006/relationships" xmlns:p="http://schemas.openxmlformats.org/presentationml/2006/main">
   <p:cSld>
     <p:bg>
       <p:bgPr>
@@ -3276,7 +3287,14 @@
         <p:cNvGrpSpPr/>
         <p:nvPr/>
       </p:nvGrpSpPr>
-      <p:grpSpPr/>
+      <p:grpSpPr>
+        <a:xfrm>
+          <a:off x="0" y="0"/>
+          <a:ext cx="0" cy="0"/>
+          <a:chOff x="0" y="0"/>
+          <a:chExt cx="0" cy="0"/>
+        </a:xfrm>
+      </p:grpSpPr>
       <p:sp>
         <p:nvSpPr>
           <p:cNvPr id="2" name="Rectangle 1"/>
@@ -3317,6 +3335,7 @@
           <a:lstStyle/>
           <a:p>
             <a:pPr algn="ctr"/>
+            <a:endParaRPr/>
           </a:p>
         </p:txBody>
       </p:sp>
@@ -3526,6 +3545,7 @@
           <a:lstStyle/>
           <a:p>
             <a:pPr algn="ctr"/>
+            <a:endParaRPr/>
           </a:p>
         </p:txBody>
       </p:sp>
@@ -3641,6 +3661,7 @@
           <a:lstStyle/>
           <a:p>
             <a:pPr algn="ctr"/>
+            <a:endParaRPr/>
           </a:p>
         </p:txBody>
       </p:sp>
@@ -3723,7 +3744,7 @@
 </file>
 
 <file path=ppt/slides/slide11.xml><?xml version="1.0" encoding="utf-8"?>
-<p:sld xmlns:a="http://schemas.openxmlformats.org/drawingml/2006/main" xmlns:p="http://schemas.openxmlformats.org/presentationml/2006/main" xmlns:r="http://schemas.openxmlformats.org/officeDocument/2006/relationships">
+<p:sld xmlns:a="http://schemas.openxmlformats.org/drawingml/2006/main" xmlns:r="http://schemas.openxmlformats.org/officeDocument/2006/relationships" xmlns:p="http://schemas.openxmlformats.org/presentationml/2006/main">
   <p:cSld>
     <p:bg>
       <p:bgPr>
@@ -3739,7 +3760,14 @@
         <p:cNvGrpSpPr/>
         <p:nvPr/>
       </p:nvGrpSpPr>
-      <p:grpSpPr/>
+      <p:grpSpPr>
+        <a:xfrm>
+          <a:off x="0" y="0"/>
+          <a:ext cx="0" cy="0"/>
+          <a:chOff x="0" y="0"/>
+          <a:chExt cx="0" cy="0"/>
+        </a:xfrm>
+      </p:grpSpPr>
       <p:sp>
         <p:nvSpPr>
           <p:cNvPr id="2" name="Rectangle 1"/>
@@ -3780,6 +3808,7 @@
           <a:lstStyle/>
           <a:p>
             <a:pPr algn="ctr"/>
+            <a:endParaRPr/>
           </a:p>
         </p:txBody>
       </p:sp>
@@ -4106,6 +4135,7 @@
           <a:lstStyle/>
           <a:p>
             <a:pPr algn="ctr"/>
+            <a:endParaRPr/>
           </a:p>
         </p:txBody>
       </p:sp>
@@ -4188,7 +4218,7 @@
 </file>
 
 <file path=ppt/slides/slide12.xml><?xml version="1.0" encoding="utf-8"?>
-<p:sld xmlns:a="http://schemas.openxmlformats.org/drawingml/2006/main" xmlns:p="http://schemas.openxmlformats.org/presentationml/2006/main" xmlns:r="http://schemas.openxmlformats.org/officeDocument/2006/relationships">
+<p:sld xmlns:a="http://schemas.openxmlformats.org/drawingml/2006/main" xmlns:r="http://schemas.openxmlformats.org/officeDocument/2006/relationships" xmlns:p="http://schemas.openxmlformats.org/presentationml/2006/main">
   <p:cSld>
     <p:bg>
       <p:bgPr>
@@ -4204,7 +4234,14 @@
         <p:cNvGrpSpPr/>
         <p:nvPr/>
       </p:nvGrpSpPr>
-      <p:grpSpPr/>
+      <p:grpSpPr>
+        <a:xfrm>
+          <a:off x="0" y="0"/>
+          <a:ext cx="0" cy="0"/>
+          <a:chOff x="0" y="0"/>
+          <a:chExt cx="0" cy="0"/>
+        </a:xfrm>
+      </p:grpSpPr>
       <p:sp>
         <p:nvSpPr>
           <p:cNvPr id="2" name="Rectangle 1"/>
@@ -4245,6 +4282,7 @@
           <a:lstStyle/>
           <a:p>
             <a:pPr algn="ctr"/>
+            <a:endParaRPr/>
           </a:p>
         </p:txBody>
       </p:sp>
@@ -4489,6 +4527,7 @@
           <a:lstStyle/>
           <a:p>
             <a:pPr algn="ctr"/>
+            <a:endParaRPr/>
           </a:p>
         </p:txBody>
       </p:sp>
@@ -4641,7 +4680,7 @@
 </file>
 
 <file path=ppt/slides/slide13.xml><?xml version="1.0" encoding="utf-8"?>
-<p:sld xmlns:a="http://schemas.openxmlformats.org/drawingml/2006/main" xmlns:p="http://schemas.openxmlformats.org/presentationml/2006/main" xmlns:r="http://schemas.openxmlformats.org/officeDocument/2006/relationships">
+<p:sld xmlns:a="http://schemas.openxmlformats.org/drawingml/2006/main" xmlns:r="http://schemas.openxmlformats.org/officeDocument/2006/relationships" xmlns:p="http://schemas.openxmlformats.org/presentationml/2006/main">
   <p:cSld>
     <p:bg>
       <p:bgPr>
@@ -4657,7 +4696,14 @@
         <p:cNvGrpSpPr/>
         <p:nvPr/>
       </p:nvGrpSpPr>
-      <p:grpSpPr/>
+      <p:grpSpPr>
+        <a:xfrm>
+          <a:off x="0" y="0"/>
+          <a:ext cx="0" cy="0"/>
+          <a:chOff x="0" y="0"/>
+          <a:chExt cx="0" cy="0"/>
+        </a:xfrm>
+      </p:grpSpPr>
       <p:sp>
         <p:nvSpPr>
           <p:cNvPr id="2" name="Rectangle 1"/>
@@ -4698,6 +4744,7 @@
           <a:lstStyle/>
           <a:p>
             <a:pPr algn="ctr"/>
+            <a:endParaRPr/>
           </a:p>
         </p:txBody>
       </p:sp>
@@ -4883,6 +4930,7 @@
           <a:lstStyle/>
           <a:p>
             <a:pPr algn="ctr"/>
+            <a:endParaRPr/>
           </a:p>
         </p:txBody>
       </p:sp>
@@ -4998,6 +5046,7 @@
           <a:lstStyle/>
           <a:p>
             <a:pPr algn="ctr"/>
+            <a:endParaRPr/>
           </a:p>
         </p:txBody>
       </p:sp>
@@ -5185,7 +5234,7 @@
 </file>
 
 <file path=ppt/slides/slide14.xml><?xml version="1.0" encoding="utf-8"?>
-<p:sld xmlns:a="http://schemas.openxmlformats.org/drawingml/2006/main" xmlns:p="http://schemas.openxmlformats.org/presentationml/2006/main" xmlns:r="http://schemas.openxmlformats.org/officeDocument/2006/relationships">
+<p:sld xmlns:a="http://schemas.openxmlformats.org/drawingml/2006/main" xmlns:r="http://schemas.openxmlformats.org/officeDocument/2006/relationships" xmlns:p="http://schemas.openxmlformats.org/presentationml/2006/main">
   <p:cSld>
     <p:bg>
       <p:bgPr>
@@ -5201,7 +5250,14 @@
         <p:cNvGrpSpPr/>
         <p:nvPr/>
       </p:nvGrpSpPr>
-      <p:grpSpPr/>
+      <p:grpSpPr>
+        <a:xfrm>
+          <a:off x="0" y="0"/>
+          <a:ext cx="0" cy="0"/>
+          <a:chOff x="0" y="0"/>
+          <a:chExt cx="0" cy="0"/>
+        </a:xfrm>
+      </p:grpSpPr>
       <p:sp>
         <p:nvSpPr>
           <p:cNvPr id="2" name="Rectangle 1"/>
@@ -5242,6 +5298,7 @@
           <a:lstStyle/>
           <a:p>
             <a:pPr algn="ctr"/>
+            <a:endParaRPr/>
           </a:p>
         </p:txBody>
       </p:sp>
@@ -5497,6 +5554,7 @@
           <a:lstStyle/>
           <a:p>
             <a:pPr algn="ctr"/>
+            <a:endParaRPr/>
           </a:p>
         </p:txBody>
       </p:sp>
@@ -5579,7 +5637,7 @@
 </file>
 
 <file path=ppt/slides/slide15.xml><?xml version="1.0" encoding="utf-8"?>
-<p:sld xmlns:a="http://schemas.openxmlformats.org/drawingml/2006/main" xmlns:p="http://schemas.openxmlformats.org/presentationml/2006/main" xmlns:r="http://schemas.openxmlformats.org/officeDocument/2006/relationships">
+<p:sld xmlns:a="http://schemas.openxmlformats.org/drawingml/2006/main" xmlns:r="http://schemas.openxmlformats.org/officeDocument/2006/relationships" xmlns:p="http://schemas.openxmlformats.org/presentationml/2006/main">
   <p:cSld>
     <p:bg>
       <p:bgPr>
@@ -5595,7 +5653,14 @@
         <p:cNvGrpSpPr/>
         <p:nvPr/>
       </p:nvGrpSpPr>
-      <p:grpSpPr/>
+      <p:grpSpPr>
+        <a:xfrm>
+          <a:off x="0" y="0"/>
+          <a:ext cx="0" cy="0"/>
+          <a:chOff x="0" y="0"/>
+          <a:chExt cx="0" cy="0"/>
+        </a:xfrm>
+      </p:grpSpPr>
       <p:sp>
         <p:nvSpPr>
           <p:cNvPr id="2" name="Rectangle 1"/>
@@ -5636,6 +5701,7 @@
           <a:lstStyle/>
           <a:p>
             <a:pPr algn="ctr"/>
+            <a:endParaRPr/>
           </a:p>
         </p:txBody>
       </p:sp>
@@ -5875,7 +5941,7 @@
         <p:spPr>
           <a:xfrm>
             <a:off x="1280160" y="4800600"/>
-            <a:ext cx="9601200" cy="914400"/>
+            <a:ext cx="9601200" cy="1137684"/>
           </a:xfrm>
           <a:prstGeom prst="roundRect">
             <a:avLst/>
@@ -5908,6 +5974,7 @@
           <a:lstStyle/>
           <a:p>
             <a:pPr algn="ctr"/>
+            <a:endParaRPr/>
           </a:p>
         </p:txBody>
       </p:sp>
@@ -5990,7 +6057,7 @@
 </file>
 
 <file path=ppt/slides/slide16.xml><?xml version="1.0" encoding="utf-8"?>
-<p:sld xmlns:a="http://schemas.openxmlformats.org/drawingml/2006/main" xmlns:p="http://schemas.openxmlformats.org/presentationml/2006/main" xmlns:r="http://schemas.openxmlformats.org/officeDocument/2006/relationships">
+<p:sld xmlns:a="http://schemas.openxmlformats.org/drawingml/2006/main" xmlns:r="http://schemas.openxmlformats.org/officeDocument/2006/relationships" xmlns:p="http://schemas.openxmlformats.org/presentationml/2006/main">
   <p:cSld>
     <p:bg>
       <p:bgPr>
@@ -6006,7 +6073,14 @@
         <p:cNvGrpSpPr/>
         <p:nvPr/>
       </p:nvGrpSpPr>
-      <p:grpSpPr/>
+      <p:grpSpPr>
+        <a:xfrm>
+          <a:off x="0" y="0"/>
+          <a:ext cx="0" cy="0"/>
+          <a:chOff x="0" y="0"/>
+          <a:chExt cx="0" cy="0"/>
+        </a:xfrm>
+      </p:grpSpPr>
       <p:sp>
         <p:nvSpPr>
           <p:cNvPr id="2" name="Rectangle 1"/>
@@ -6047,6 +6121,7 @@
           <a:lstStyle/>
           <a:p>
             <a:pPr algn="ctr"/>
+            <a:endParaRPr/>
           </a:p>
         </p:txBody>
       </p:sp>
@@ -6335,6 +6410,7 @@
           <a:lstStyle/>
           <a:p>
             <a:pPr algn="ctr"/>
+            <a:endParaRPr/>
           </a:p>
         </p:txBody>
       </p:sp>
@@ -6417,7 +6493,7 @@
 </file>
 
 <file path=ppt/slides/slide2.xml><?xml version="1.0" encoding="utf-8"?>
-<p:sld xmlns:a="http://schemas.openxmlformats.org/drawingml/2006/main" xmlns:p="http://schemas.openxmlformats.org/presentationml/2006/main" xmlns:r="http://schemas.openxmlformats.org/officeDocument/2006/relationships">
+<p:sld xmlns:a="http://schemas.openxmlformats.org/drawingml/2006/main" xmlns:r="http://schemas.openxmlformats.org/officeDocument/2006/relationships" xmlns:p="http://schemas.openxmlformats.org/presentationml/2006/main">
   <p:cSld>
     <p:bg>
       <p:bgPr>
@@ -6433,7 +6509,14 @@
         <p:cNvGrpSpPr/>
         <p:nvPr/>
       </p:nvGrpSpPr>
-      <p:grpSpPr/>
+      <p:grpSpPr>
+        <a:xfrm>
+          <a:off x="0" y="0"/>
+          <a:ext cx="0" cy="0"/>
+          <a:chOff x="0" y="0"/>
+          <a:chExt cx="0" cy="0"/>
+        </a:xfrm>
+      </p:grpSpPr>
       <p:sp>
         <p:nvSpPr>
           <p:cNvPr id="2" name="Rectangle 1"/>
@@ -6474,6 +6557,7 @@
           <a:lstStyle/>
           <a:p>
             <a:pPr algn="ctr"/>
+            <a:endParaRPr/>
           </a:p>
         </p:txBody>
       </p:sp>
@@ -6762,6 +6846,7 @@
           <a:lstStyle/>
           <a:p>
             <a:pPr algn="ctr"/>
+            <a:endParaRPr/>
           </a:p>
         </p:txBody>
       </p:sp>
@@ -6844,7 +6929,7 @@
 </file>
 
 <file path=ppt/slides/slide3.xml><?xml version="1.0" encoding="utf-8"?>
-<p:sld xmlns:a="http://schemas.openxmlformats.org/drawingml/2006/main" xmlns:p="http://schemas.openxmlformats.org/presentationml/2006/main" xmlns:r="http://schemas.openxmlformats.org/officeDocument/2006/relationships">
+<p:sld xmlns:a="http://schemas.openxmlformats.org/drawingml/2006/main" xmlns:r="http://schemas.openxmlformats.org/officeDocument/2006/relationships" xmlns:p="http://schemas.openxmlformats.org/presentationml/2006/main">
   <p:cSld>
     <p:bg>
       <p:bgPr>
@@ -6860,7 +6945,14 @@
         <p:cNvGrpSpPr/>
         <p:nvPr/>
       </p:nvGrpSpPr>
-      <p:grpSpPr/>
+      <p:grpSpPr>
+        <a:xfrm>
+          <a:off x="0" y="0"/>
+          <a:ext cx="0" cy="0"/>
+          <a:chOff x="0" y="0"/>
+          <a:chExt cx="0" cy="0"/>
+        </a:xfrm>
+      </p:grpSpPr>
       <p:sp>
         <p:nvSpPr>
           <p:cNvPr id="2" name="Rectangle 1"/>
@@ -6901,6 +6993,7 @@
           <a:lstStyle/>
           <a:p>
             <a:pPr algn="ctr"/>
+            <a:endParaRPr/>
           </a:p>
         </p:txBody>
       </p:sp>
@@ -7226,6 +7319,7 @@
           <a:lstStyle/>
           <a:p>
             <a:pPr algn="ctr"/>
+            <a:endParaRPr/>
           </a:p>
         </p:txBody>
       </p:sp>
@@ -7308,7 +7402,7 @@
 </file>
 
 <file path=ppt/slides/slide4.xml><?xml version="1.0" encoding="utf-8"?>
-<p:sld xmlns:a="http://schemas.openxmlformats.org/drawingml/2006/main" xmlns:p="http://schemas.openxmlformats.org/presentationml/2006/main" xmlns:r="http://schemas.openxmlformats.org/officeDocument/2006/relationships">
+<p:sld xmlns:a="http://schemas.openxmlformats.org/drawingml/2006/main" xmlns:r="http://schemas.openxmlformats.org/officeDocument/2006/relationships" xmlns:p="http://schemas.openxmlformats.org/presentationml/2006/main">
   <p:cSld>
     <p:bg>
       <p:bgPr>
@@ -7324,7 +7418,14 @@
         <p:cNvGrpSpPr/>
         <p:nvPr/>
       </p:nvGrpSpPr>
-      <p:grpSpPr/>
+      <p:grpSpPr>
+        <a:xfrm>
+          <a:off x="0" y="0"/>
+          <a:ext cx="0" cy="0"/>
+          <a:chOff x="0" y="0"/>
+          <a:chExt cx="0" cy="0"/>
+        </a:xfrm>
+      </p:grpSpPr>
       <p:sp>
         <p:nvSpPr>
           <p:cNvPr id="2" name="Rectangle 1"/>
@@ -7365,6 +7466,7 @@
           <a:lstStyle/>
           <a:p>
             <a:pPr algn="ctr"/>
+            <a:endParaRPr/>
           </a:p>
         </p:txBody>
       </p:sp>
@@ -7690,6 +7792,7 @@
           <a:lstStyle/>
           <a:p>
             <a:pPr algn="ctr"/>
+            <a:endParaRPr/>
           </a:p>
         </p:txBody>
       </p:sp>
@@ -7805,6 +7908,7 @@
           <a:lstStyle/>
           <a:p>
             <a:pPr algn="ctr"/>
+            <a:endParaRPr/>
           </a:p>
         </p:txBody>
       </p:sp>
@@ -7887,7 +7991,7 @@
 </file>
 
 <file path=ppt/slides/slide5.xml><?xml version="1.0" encoding="utf-8"?>
-<p:sld xmlns:a="http://schemas.openxmlformats.org/drawingml/2006/main" xmlns:p="http://schemas.openxmlformats.org/presentationml/2006/main" xmlns:r="http://schemas.openxmlformats.org/officeDocument/2006/relationships">
+<p:sld xmlns:a="http://schemas.openxmlformats.org/drawingml/2006/main" xmlns:r="http://schemas.openxmlformats.org/officeDocument/2006/relationships" xmlns:p="http://schemas.openxmlformats.org/presentationml/2006/main">
   <p:cSld>
     <p:bg>
       <p:bgPr>
@@ -7903,7 +8007,14 @@
         <p:cNvGrpSpPr/>
         <p:nvPr/>
       </p:nvGrpSpPr>
-      <p:grpSpPr/>
+      <p:grpSpPr>
+        <a:xfrm>
+          <a:off x="0" y="0"/>
+          <a:ext cx="0" cy="0"/>
+          <a:chOff x="0" y="0"/>
+          <a:chExt cx="0" cy="0"/>
+        </a:xfrm>
+      </p:grpSpPr>
       <p:sp>
         <p:nvSpPr>
           <p:cNvPr id="2" name="Rectangle 1"/>
@@ -7944,6 +8055,7 @@
           <a:lstStyle/>
           <a:p>
             <a:pPr algn="ctr"/>
+            <a:endParaRPr/>
           </a:p>
         </p:txBody>
       </p:sp>
@@ -8178,8 +8290,8 @@
         </p:nvSpPr>
         <p:spPr>
           <a:xfrm>
-            <a:off x="1463040" y="4892040"/>
-            <a:ext cx="9235440" cy="914400"/>
+            <a:off x="1463040" y="4892039"/>
+            <a:ext cx="9235440" cy="1024979"/>
           </a:xfrm>
           <a:prstGeom prst="roundRect">
             <a:avLst/>
@@ -8212,6 +8324,7 @@
           <a:lstStyle/>
           <a:p>
             <a:pPr algn="ctr"/>
+            <a:endParaRPr/>
           </a:p>
         </p:txBody>
       </p:sp>
@@ -8274,7 +8387,7 @@
           <a:p>
             <a:pPr algn="l"/>
             <a:r>
-              <a:rPr sz="1700" b="0">
+              <a:rPr sz="1700" b="0" dirty="0">
                 <a:solidFill>
                   <a:srgbClr val="191E26"/>
                 </a:solidFill>
@@ -8294,7 +8407,7 @@
 </file>
 
 <file path=ppt/slides/slide6.xml><?xml version="1.0" encoding="utf-8"?>
-<p:sld xmlns:a="http://schemas.openxmlformats.org/drawingml/2006/main" xmlns:p="http://schemas.openxmlformats.org/presentationml/2006/main" xmlns:r="http://schemas.openxmlformats.org/officeDocument/2006/relationships">
+<p:sld xmlns:a="http://schemas.openxmlformats.org/drawingml/2006/main" xmlns:r="http://schemas.openxmlformats.org/officeDocument/2006/relationships" xmlns:p="http://schemas.openxmlformats.org/presentationml/2006/main">
   <p:cSld>
     <p:bg>
       <p:bgPr>
@@ -8310,7 +8423,14 @@
         <p:cNvGrpSpPr/>
         <p:nvPr/>
       </p:nvGrpSpPr>
-      <p:grpSpPr/>
+      <p:grpSpPr>
+        <a:xfrm>
+          <a:off x="0" y="0"/>
+          <a:ext cx="0" cy="0"/>
+          <a:chOff x="0" y="0"/>
+          <a:chExt cx="0" cy="0"/>
+        </a:xfrm>
+      </p:grpSpPr>
       <p:sp>
         <p:nvSpPr>
           <p:cNvPr id="2" name="Rectangle 1"/>
@@ -8351,6 +8471,7 @@
           <a:lstStyle/>
           <a:p>
             <a:pPr algn="ctr"/>
+            <a:endParaRPr/>
           </a:p>
         </p:txBody>
       </p:sp>
@@ -8712,6 +8833,7 @@
           <a:lstStyle/>
           <a:p>
             <a:pPr algn="ctr"/>
+            <a:endParaRPr/>
           </a:p>
         </p:txBody>
       </p:sp>
@@ -8794,7 +8916,7 @@
 </file>
 
 <file path=ppt/slides/slide7.xml><?xml version="1.0" encoding="utf-8"?>
-<p:sld xmlns:a="http://schemas.openxmlformats.org/drawingml/2006/main" xmlns:p="http://schemas.openxmlformats.org/presentationml/2006/main" xmlns:r="http://schemas.openxmlformats.org/officeDocument/2006/relationships">
+<p:sld xmlns:a="http://schemas.openxmlformats.org/drawingml/2006/main" xmlns:r="http://schemas.openxmlformats.org/officeDocument/2006/relationships" xmlns:p="http://schemas.openxmlformats.org/presentationml/2006/main">
   <p:cSld>
     <p:bg>
       <p:bgPr>
@@ -8810,7 +8932,14 @@
         <p:cNvGrpSpPr/>
         <p:nvPr/>
       </p:nvGrpSpPr>
-      <p:grpSpPr/>
+      <p:grpSpPr>
+        <a:xfrm>
+          <a:off x="0" y="0"/>
+          <a:ext cx="0" cy="0"/>
+          <a:chOff x="0" y="0"/>
+          <a:chExt cx="0" cy="0"/>
+        </a:xfrm>
+      </p:grpSpPr>
       <p:sp>
         <p:nvSpPr>
           <p:cNvPr id="2" name="Rectangle 1"/>
@@ -8851,6 +8980,7 @@
           <a:lstStyle/>
           <a:p>
             <a:pPr algn="ctr"/>
+            <a:endParaRPr/>
           </a:p>
         </p:txBody>
       </p:sp>
@@ -9060,6 +9190,7 @@
           <a:lstStyle/>
           <a:p>
             <a:pPr algn="ctr"/>
+            <a:endParaRPr/>
           </a:p>
         </p:txBody>
       </p:sp>
@@ -9175,6 +9306,7 @@
           <a:lstStyle/>
           <a:p>
             <a:pPr algn="ctr"/>
+            <a:endParaRPr/>
           </a:p>
         </p:txBody>
       </p:sp>
@@ -9292,7 +9424,7 @@
 </file>
 
 <file path=ppt/slides/slide8.xml><?xml version="1.0" encoding="utf-8"?>
-<p:sld xmlns:a="http://schemas.openxmlformats.org/drawingml/2006/main" xmlns:p="http://schemas.openxmlformats.org/presentationml/2006/main" xmlns:r="http://schemas.openxmlformats.org/officeDocument/2006/relationships">
+<p:sld xmlns:a="http://schemas.openxmlformats.org/drawingml/2006/main" xmlns:r="http://schemas.openxmlformats.org/officeDocument/2006/relationships" xmlns:p="http://schemas.openxmlformats.org/presentationml/2006/main">
   <p:cSld>
     <p:bg>
       <p:bgPr>
@@ -9308,7 +9440,14 @@
         <p:cNvGrpSpPr/>
         <p:nvPr/>
       </p:nvGrpSpPr>
-      <p:grpSpPr/>
+      <p:grpSpPr>
+        <a:xfrm>
+          <a:off x="0" y="0"/>
+          <a:ext cx="0" cy="0"/>
+          <a:chOff x="0" y="0"/>
+          <a:chExt cx="0" cy="0"/>
+        </a:xfrm>
+      </p:grpSpPr>
       <p:sp>
         <p:nvSpPr>
           <p:cNvPr id="2" name="Rectangle 1"/>
@@ -9349,6 +9488,7 @@
           <a:lstStyle/>
           <a:p>
             <a:pPr algn="ctr"/>
+            <a:endParaRPr/>
           </a:p>
         </p:txBody>
       </p:sp>
@@ -9674,6 +9814,7 @@
           <a:lstStyle/>
           <a:p>
             <a:pPr algn="ctr"/>
+            <a:endParaRPr/>
           </a:p>
         </p:txBody>
       </p:sp>
@@ -9756,7 +9897,7 @@
 </file>
 
 <file path=ppt/slides/slide9.xml><?xml version="1.0" encoding="utf-8"?>
-<p:sld xmlns:a="http://schemas.openxmlformats.org/drawingml/2006/main" xmlns:p="http://schemas.openxmlformats.org/presentationml/2006/main" xmlns:r="http://schemas.openxmlformats.org/officeDocument/2006/relationships">
+<p:sld xmlns:a="http://schemas.openxmlformats.org/drawingml/2006/main" xmlns:r="http://schemas.openxmlformats.org/officeDocument/2006/relationships" xmlns:p="http://schemas.openxmlformats.org/presentationml/2006/main">
   <p:cSld>
     <p:bg>
       <p:bgPr>
@@ -9772,7 +9913,14 @@
         <p:cNvGrpSpPr/>
         <p:nvPr/>
       </p:nvGrpSpPr>
-      <p:grpSpPr/>
+      <p:grpSpPr>
+        <a:xfrm>
+          <a:off x="0" y="0"/>
+          <a:ext cx="0" cy="0"/>
+          <a:chOff x="0" y="0"/>
+          <a:chExt cx="0" cy="0"/>
+        </a:xfrm>
+      </p:grpSpPr>
       <p:sp>
         <p:nvSpPr>
           <p:cNvPr id="2" name="Rectangle 1"/>
@@ -9813,6 +9961,7 @@
           <a:lstStyle/>
           <a:p>
             <a:pPr algn="ctr"/>
+            <a:endParaRPr/>
           </a:p>
         </p:txBody>
       </p:sp>
@@ -10105,8 +10254,8 @@
         </p:nvSpPr>
         <p:spPr>
           <a:xfrm>
-            <a:off x="2011680" y="5166360"/>
-            <a:ext cx="8138160" cy="731520"/>
+            <a:off x="1963834" y="5184648"/>
+            <a:ext cx="8138160" cy="1014984"/>
           </a:xfrm>
           <a:prstGeom prst="roundRect">
             <a:avLst/>
@@ -10139,6 +10288,7 @@
           <a:lstStyle/>
           <a:p>
             <a:pPr algn="ctr"/>
+            <a:endParaRPr/>
           </a:p>
         </p:txBody>
       </p:sp>
@@ -10201,7 +10351,7 @@
           <a:p>
             <a:pPr algn="l"/>
             <a:r>
-              <a:rPr sz="1700" b="0">
+              <a:rPr sz="1700" b="0" dirty="0">
                 <a:solidFill>
                   <a:srgbClr val="191E26"/>
                 </a:solidFill>
